--- a/docs/doc_a_soumetre_pour_hackathon/en/04_kwatsur_presentation.pptx
+++ b/docs/doc_a_soumetre_pour_hackathon/en/04_kwatsur_presentation.pptx
@@ -1,6 +1,6 @@
 
 <file path=ppt/presentation.xml><?xml version="1.0" encoding="utf-8"?>
-<p:presentation xmlns:a="http://schemas.openxmlformats.org/drawingml/2006/main" xmlns:r="http://schemas.openxmlformats.org/officeDocument/2006/relationships" xmlns:p="http://schemas.openxmlformats.org/presentationml/2006/main" saveSubsetFonts="1" autoCompressPictures="0">
+<p:presentation xmlns:a="http://schemas.openxmlformats.org/drawingml/2006/main" xmlns:ns3="http://schemas.microsoft.com/office/powerpoint/2010/main" xmlns:ns4="http://schemas.microsoft.com/office/powerpoint/2012/main" xmlns:p="http://schemas.openxmlformats.org/presentationml/2006/main" xmlns:r="http://schemas.openxmlformats.org/officeDocument/2006/relationships" saveSubsetFonts="1" autoCompressPictures="0">
   <p:sldMasterIdLst>
     <p:sldMasterId id="2147483648" r:id="rId1"/>
   </p:sldMasterIdLst>
@@ -14,6 +14,8 @@
     <p:sldId id="262" r:id="rId8"/>
     <p:sldId id="263" r:id="rId9"/>
     <p:sldId id="264" r:id="rId10"/>
+    <p:sldId id="267" r:id="rId18"/>
+    <p:sldId id="268" r:id="rId19"/>
     <p:sldId id="265" r:id="rId11"/>
     <p:sldId id="266" r:id="rId12"/>
   </p:sldIdLst>
@@ -116,42 +118,42 @@
   </p:defaultTextStyle>
   <p:extLst>
     <p:ext uri="{521415D9-36F7-43E2-AB2F-B90AF26B5E84}">
-      <p14:sectionLst xmlns:p14="http://schemas.microsoft.com/office/powerpoint/2010/main">
-        <p14:section name="Introduction" id="{e6c2926f-72f4-270d-8502-e51910674dba}">
-          <p14:sldIdLst>
-            <p14:sldId id="256"/>
-          </p14:sldIdLst>
-        </p14:section>
-        <p14:section name="Problem and solution" id="{3b8f6ee5-682e-31ba-2a47-741328fcd849}">
-          <p14:sldIdLst>
-            <p14:sldId id="257"/>
-            <p14:sldId id="258"/>
-          </p14:sldIdLst>
-        </p14:section>
-        <p14:section name="Architecture" id="{8ad813a2-2e9e-756b-ed30-18b95fa6c5d1}">
-          <p14:sldIdLst>
-            <p14:sldId id="259"/>
-            <p14:sldId id="260"/>
-          </p14:sldIdLst>
-        </p14:section>
-        <p14:section name="Sponsor technologies" id="{6c172649-d117-4fa9-11dd-48610a613660}">
-          <p14:sldIdLst>
-            <p14:sldId id="261"/>
-            <p14:sldId id="262"/>
-            <p14:sldId id="263"/>
-          </p14:sldIdLst>
-        </p14:section>
-        <p14:section name="Product and next steps" id="{be8cbcad-e52c-1ef4-f1d2-f3aff6529f0f}">
-          <p14:sldIdLst>
-            <p14:sldId id="264"/>
-            <p14:sldId id="265"/>
-            <p14:sldId id="266"/>
-          </p14:sldIdLst>
-        </p14:section>
-      </p14:sectionLst>
+      <ns3:sectionLst>
+        <ns3:section name="Introduction" id="{e6c2926f-72f4-270d-8502-e51910674dba}">
+          <ns3:sldIdLst>
+            <ns3:sldId id="256"/>
+          </ns3:sldIdLst>
+        </ns3:section>
+        <ns3:section name="Problem and solution" id="{3b8f6ee5-682e-31ba-2a47-741328fcd849}">
+          <ns3:sldIdLst>
+            <ns3:sldId id="257"/>
+            <ns3:sldId id="258"/>
+          </ns3:sldIdLst>
+        </ns3:section>
+        <ns3:section name="Architecture" id="{8ad813a2-2e9e-756b-ed30-18b95fa6c5d1}">
+          <ns3:sldIdLst>
+            <ns3:sldId id="259"/>
+            <ns3:sldId id="260"/>
+          </ns3:sldIdLst>
+        </ns3:section>
+        <ns3:section name="Sponsor technologies" id="{6c172649-d117-4fa9-11dd-48610a613660}">
+          <ns3:sldIdLst>
+            <ns3:sldId id="261"/>
+            <ns3:sldId id="262"/>
+            <ns3:sldId id="263"/>
+          </ns3:sldIdLst>
+        </ns3:section>
+        <ns3:section name="Product and next steps" id="{be8cbcad-e52c-1ef4-f1d2-f3aff6529f0f}">
+          <ns3:sldIdLst>
+            <ns3:sldId id="264"/>
+            <ns3:sldId id="265"/>
+            <ns3:sldId id="266"/>
+          </ns3:sldIdLst>
+        </ns3:section>
+      </ns3:sectionLst>
     </p:ext>
     <p:ext uri="{EFAFB233-063F-42B5-8137-9DF3F51BA10A}">
-      <p15:sldGuideLst xmlns:p15="http://schemas.microsoft.com/office/powerpoint/2012/main"/>
+      <ns4:sldGuideLst/>
     </p:ext>
   </p:extLst>
 </p:presentation>
@@ -2343,7 +2345,7 @@
 </file>
 
 <file path=ppt/slides/slide10.xml><?xml version="1.0" encoding="utf-8"?>
-<p:sld xmlns:a="http://schemas.openxmlformats.org/drawingml/2006/main" xmlns:r="http://schemas.openxmlformats.org/officeDocument/2006/relationships" xmlns:p="http://schemas.openxmlformats.org/presentationml/2006/main">
+<p:sld xmlns:a="http://schemas.openxmlformats.org/drawingml/2006/main" xmlns:ns2="http://schemas.microsoft.com/office/mac/drawingml/2011/main" xmlns:p="http://schemas.openxmlformats.org/presentationml/2006/main">
   <p:cSld name="Slide 10">
     <p:spTree>
       <p:nvGrpSpPr>
@@ -3326,7 +3328,7 @@
           </a:prstGeom>
           <a:extLst>
             <a:ext uri="{C572A759-6A51-4108-AA02-DFA0A04FC94B}">
-              <ma14:wrappingTextBoxFlag xmlns:ma14="http://schemas.microsoft.com/office/mac/drawingml/2011/main" val="0"/>
+              <ns2:wrappingTextBoxFlag val="0"/>
             </a:ext>
           </a:extLst>
         </p:spPr>
@@ -3348,7 +3350,7 @@
             <a:pPr algn="r"/>
             <a:fld id="{F7021451-1387-4CA6-816F-3879F97B5CBC}" type="slidenum">
               <a:rPr b="0" lang="en-US"/>
-              <a:t>10</a:t>
+              <a:t>12</a:t>
             </a:fld>
             <a:endParaRPr lang="en-US"/>
           </a:p>
@@ -3363,7 +3365,7 @@
 </file>
 
 <file path=ppt/slides/slide11.xml><?xml version="1.0" encoding="utf-8"?>
-<p:sld xmlns:a="http://schemas.openxmlformats.org/drawingml/2006/main" xmlns:r="http://schemas.openxmlformats.org/officeDocument/2006/relationships" xmlns:p="http://schemas.openxmlformats.org/presentationml/2006/main">
+<p:sld xmlns:a="http://schemas.openxmlformats.org/drawingml/2006/main" xmlns:p="http://schemas.openxmlformats.org/presentationml/2006/main" xmlns:r="http://schemas.openxmlformats.org/officeDocument/2006/relationships">
   <p:cSld name="Slide 11">
     <p:spTree>
       <p:nvGrpSpPr>
@@ -3455,7 +3457,7 @@
                 <a:ea typeface="Calibri" pitchFamily="34" charset="-122"/>
                 <a:cs typeface="Calibri" pitchFamily="34" charset="-120"/>
               </a:rPr>
-              <a:t>Kwatsur searches, checks and explains, without ever inventing.</a:t>
+              <a:t>Kwatsur searches, explains and flags what still needs checking.</a:t>
             </a:r>
             <a:endParaRPr lang="en-US" sz="2400" dirty="0"/>
           </a:p>
@@ -3582,9 +3584,363 @@
                 <a:ea typeface="Calibri" pitchFamily="34" charset="-122"/>
                 <a:cs typeface="Calibri" pitchFamily="34" charset="-120"/>
               </a:rPr>
-              <a:t>Start: docker compose up --build  ·  fallback without external services: SAMPLE_MODE=true</a:t>
+              <a:t>Backend and frontend: two Docker Compose projects. Interface: 8080. Offline mode: SAMPLE_MODE=true.</a:t>
             </a:r>
             <a:endParaRPr lang="en-US" sz="1400" dirty="0"/>
+          </a:p>
+        </p:txBody>
+      </p:sp>
+    </p:spTree>
+  </p:cSld>
+  <p:clrMapOvr>
+    <a:masterClrMapping/>
+  </p:clrMapOvr>
+</p:sld>
+</file>
+
+<file path=ppt/slides/slide12.xml><?xml version="1.0" encoding="utf-8"?>
+<p:sld xmlns:a="http://schemas.openxmlformats.org/drawingml/2006/main" xmlns:ns3="http://schemas.microsoft.com/office/mac/drawingml/2011/main" xmlns:p="http://schemas.openxmlformats.org/presentationml/2006/main" xmlns:r="http://schemas.openxmlformats.org/officeDocument/2006/relationships">
+  <p:cSld name="Slide 9">
+    <p:spTree>
+      <p:nvGrpSpPr>
+        <p:cNvPr id="1" name=""/>
+        <p:cNvGrpSpPr/>
+        <p:nvPr/>
+      </p:nvGrpSpPr>
+      <p:grpSpPr>
+        <a:xfrm>
+          <a:off x="0" y="0"/>
+          <a:ext cx="0" cy="0"/>
+          <a:chOff x="0" y="0"/>
+          <a:chExt cx="0" cy="0"/>
+        </a:xfrm>
+      </p:grpSpPr>
+      <p:sp>
+        <p:nvSpPr>
+          <p:cNvPr id="2" name="Text 0"/>
+          <p:cNvSpPr/>
+          <p:nvPr>
+            <p:ph idx="100" type="title" hasCustomPrompt="1"/>
+          </p:nvPr>
+        </p:nvSpPr>
+        <p:spPr>
+          <a:xfrm>
+            <a:off x="548640" y="411480"/>
+            <a:ext cx="11094415" cy="822960"/>
+          </a:xfrm>
+          <a:prstGeom prst="rect">
+            <a:avLst/>
+          </a:prstGeom>
+          <a:noFill/>
+          <a:ln/>
+        </p:spPr>
+        <p:txBody>
+          <a:bodyPr wrap="square" lIns="0" tIns="0" rIns="0" bIns="0" rtlCol="0" anchor="ctr"/>
+          <a:lstStyle/>
+          <a:p>
+            <a:pPr algn="l" indent="0" marL="0">
+              <a:buNone/>
+            </a:pPr>
+            <a:r>
+              <a:rPr lang="en-US" sz="3400" b="1" dirty="0">
+                <a:solidFill>
+                  <a:schemeClr val="tx1"/>
+                </a:solidFill>
+                <a:latin typeface="Arial" pitchFamily="34" charset="0"/>
+                <a:ea typeface="Arial" pitchFamily="34" charset="-122"/>
+                <a:cs typeface="Arial" pitchFamily="34" charset="-120"/>
+              </a:rPr>
+              <a:t>Submit a home: confirmation stays pending</a:t>
+            </a:r>
+            <a:endParaRPr lang="en-US" sz="3400" dirty="0"/>
+          </a:p>
+        </p:txBody>
+      </p:sp>
+      <p:pic>
+        <p:nvPicPr>
+          <p:cNvPr id="3" name="Search results" descr="Kwatsur results: listing card with a labelled sample photo, rent and amenities">    </p:cNvPr>
+          <p:cNvPicPr>
+            <a:picLocks noChangeAspect="1"/>
+          </p:cNvPicPr>
+          <p:nvPr/>
+        </p:nvPicPr>
+        <p:blipFill>
+          <a:blip r:embed="rId1"/>
+          <a:stretch>
+            <a:fillRect/>
+          </a:stretch>
+        </p:blipFill>
+        <p:spPr>
+          <a:xfrm>
+            <a:off x="548640" y="1270000"/>
+            <a:ext cx="11094415" cy="4250000"/>
+          </a:xfrm>
+          <a:prstGeom prst="rect">
+            <a:avLst/>
+          </a:prstGeom>
+        </p:spPr>
+      </p:pic>
+      <p:sp>
+        <p:nvSpPr>
+          <p:cNvPr id="5" name="Text 1"/>
+          <p:cNvSpPr txBox="1"/>
+          <p:nvPr/>
+        </p:nvSpPr>
+        <p:spPr>
+          <a:xfrm>
+            <a:off x="548640" y="5580000"/>
+            <a:ext cx="11094415" cy="640080"/>
+          </a:xfrm>
+          <a:prstGeom prst="rect">
+            <a:avLst/>
+          </a:prstGeom>
+          <a:noFill/>
+          <a:ln/>
+        </p:spPr>
+        <p:txBody>
+          <a:bodyPr wrap="square" lIns="0" tIns="0" rIns="0" bIns="0" rtlCol="0" anchor="t"/>
+          <a:lstStyle/>
+          <a:p>
+            <a:pPr indent="0" marL="0">
+              <a:buNone/>
+            </a:pPr>
+            <a:r>
+              <a:rPr lang="en-US" sz="1500" dirty="0">
+                <a:solidFill>
+                  <a:schemeClr val="accent6"/>
+                </a:solidFill>
+                <a:latin typeface="Calibri" pitchFamily="34" charset="0"/>
+                <a:ea typeface="Calibri" pitchFamily="34" charset="-122"/>
+                <a:cs typeface="Calibri" pitchFamily="34" charset="-120"/>
+              </a:rPr>
+              <a:t>User-provided capture, anonymised. Draft confirmed in chat; pending proposal stored, not published. UI is in French.</a:t>
+            </a:r>
+            <a:endParaRPr lang="en-US" sz="1300" dirty="0"/>
+          </a:p>
+        </p:txBody>
+      </p:sp>
+      <p:sp>
+        <p:nvSpPr>
+          <p:cNvPr id="25" name="Slide Number Placeholder 0"/>
+          <p:cNvSpPr>
+            <a:spLocks noGrp="1"/>
+          </p:cNvSpPr>
+          <p:nvPr>
+            <p:ph type="sldNum" sz="quarter" idx="4294967295"/>
+          </p:nvPr>
+        </p:nvSpPr>
+        <p:spPr>
+          <a:xfrm>
+            <a:off x="11094415" y="6400800"/>
+            <a:ext cx="548640" cy="274320"/>
+          </a:xfrm>
+          <a:prstGeom prst="rect">
+            <a:avLst/>
+          </a:prstGeom>
+          <a:extLst>
+            <a:ext uri="{C572A759-6A51-4108-AA02-DFA0A04FC94B}">
+              <ns3:wrappingTextBoxFlag val="0"/>
+            </a:ext>
+          </a:extLst>
+        </p:spPr>
+        <p:txBody>
+          <a:bodyPr/>
+          <a:lstStyle>
+            <a:lvl1pPr>
+              <a:defRPr sz="1000">
+                <a:solidFill>
+                  <a:schemeClr val="accent6"/>
+                </a:solidFill>
+                <a:latin typeface="Calibri"/>
+                <a:ea typeface="Calibri"/>
+                <a:cs typeface="Calibri"/>
+              </a:defRPr>
+            </a:lvl1pPr>
+          </a:lstStyle>
+          <a:p>
+            <a:pPr algn="r"/>
+            <a:fld id="{F7021451-1387-4CA6-816F-3879F97B5CBC}" type="slidenum">
+              <a:rPr b="0" lang="en-US"/>
+              <a:t>10</a:t>
+            </a:fld>
+            <a:endParaRPr lang="en-US"/>
+          </a:p>
+        </p:txBody>
+      </p:sp>
+    </p:spTree>
+  </p:cSld>
+  <p:clrMapOvr>
+    <a:masterClrMapping/>
+  </p:clrMapOvr>
+</p:sld>
+</file>
+
+<file path=ppt/slides/slide13.xml><?xml version="1.0" encoding="utf-8"?>
+<p:sld xmlns:a="http://schemas.openxmlformats.org/drawingml/2006/main" xmlns:ns3="http://schemas.microsoft.com/office/mac/drawingml/2011/main" xmlns:p="http://schemas.openxmlformats.org/presentationml/2006/main" xmlns:r="http://schemas.openxmlformats.org/officeDocument/2006/relationships">
+  <p:cSld name="Slide 9">
+    <p:spTree>
+      <p:nvGrpSpPr>
+        <p:cNvPr id="1" name=""/>
+        <p:cNvGrpSpPr/>
+        <p:nvPr/>
+      </p:nvGrpSpPr>
+      <p:grpSpPr>
+        <a:xfrm>
+          <a:off x="0" y="0"/>
+          <a:ext cx="0" cy="0"/>
+          <a:chOff x="0" y="0"/>
+          <a:chExt cx="0" cy="0"/>
+        </a:xfrm>
+      </p:grpSpPr>
+      <p:sp>
+        <p:nvSpPr>
+          <p:cNvPr id="2" name="Text 0"/>
+          <p:cNvSpPr/>
+          <p:nvPr>
+            <p:ph idx="100" type="title" hasCustomPrompt="1"/>
+          </p:nvPr>
+        </p:nvSpPr>
+        <p:spPr>
+          <a:xfrm>
+            <a:off x="548640" y="411480"/>
+            <a:ext cx="11094415" cy="822960"/>
+          </a:xfrm>
+          <a:prstGeom prst="rect">
+            <a:avLst/>
+          </a:prstGeom>
+          <a:noFill/>
+          <a:ln/>
+        </p:spPr>
+        <p:txBody>
+          <a:bodyPr wrap="square" lIns="0" tIns="0" rIns="0" bIns="0" rtlCol="0" anchor="ctr"/>
+          <a:lstStyle/>
+          <a:p>
+            <a:pPr algn="l" indent="0" marL="0">
+              <a:buNone/>
+            </a:pPr>
+            <a:r>
+              <a:rPr lang="en-US" sz="3400" b="1" dirty="0">
+                <a:solidFill>
+                  <a:schemeClr val="tx1"/>
+                </a:solidFill>
+                <a:latin typeface="Arial" pitchFamily="34" charset="0"/>
+                <a:ea typeface="Arial" pitchFamily="34" charset="-122"/>
+                <a:cs typeface="Arial" pitchFamily="34" charset="-120"/>
+              </a:rPr>
+              <a:t>Admin review before publication</a:t>
+            </a:r>
+            <a:endParaRPr lang="en-US" sz="3400" dirty="0"/>
+          </a:p>
+        </p:txBody>
+      </p:sp>
+      <p:pic>
+        <p:nvPicPr>
+          <p:cNvPr id="3" name="Search results" descr="Kwatsur results: listing card with a labelled sample photo, rent and amenities">    </p:cNvPr>
+          <p:cNvPicPr>
+            <a:picLocks noChangeAspect="1"/>
+          </p:cNvPicPr>
+          <p:nvPr/>
+        </p:nvPicPr>
+        <p:blipFill>
+          <a:blip r:embed="rId1"/>
+          <a:stretch>
+            <a:fillRect/>
+          </a:stretch>
+        </p:blipFill>
+        <p:spPr>
+          <a:xfrm>
+            <a:off x="548640" y="1270000"/>
+            <a:ext cx="11094415" cy="4250000"/>
+          </a:xfrm>
+          <a:prstGeom prst="rect">
+            <a:avLst/>
+          </a:prstGeom>
+        </p:spPr>
+      </p:pic>
+      <p:sp>
+        <p:nvSpPr>
+          <p:cNvPr id="5" name="Text 1"/>
+          <p:cNvSpPr txBox="1"/>
+          <p:nvPr/>
+        </p:nvSpPr>
+        <p:spPr>
+          <a:xfrm>
+            <a:off x="548640" y="5580000"/>
+            <a:ext cx="11094415" cy="640080"/>
+          </a:xfrm>
+          <a:prstGeom prst="rect">
+            <a:avLst/>
+          </a:prstGeom>
+          <a:noFill/>
+          <a:ln/>
+        </p:spPr>
+        <p:txBody>
+          <a:bodyPr wrap="square" lIns="0" tIns="0" rIns="0" bIns="0" rtlCol="0" anchor="t"/>
+          <a:lstStyle/>
+          <a:p>
+            <a:pPr indent="0" marL="0">
+              <a:buNone/>
+            </a:pPr>
+            <a:r>
+              <a:rPr lang="en-US" sz="1500" dirty="0">
+                <a:solidFill>
+                  <a:schemeClr val="accent6"/>
+                </a:solidFill>
+                <a:latin typeface="Calibri" pitchFamily="34" charset="0"/>
+                <a:ea typeface="Calibri" pitchFamily="34" charset="-122"/>
+                <a:cs typeface="Calibri" pitchFamily="34" charset="-120"/>
+              </a:rPr>
+              <a:t>User-provided capture, anonymised. Pending proposal, note and approve/reject controls. Approval is covered offline; this is not a live publication.</a:t>
+            </a:r>
+            <a:endParaRPr lang="en-US" sz="1300" dirty="0"/>
+          </a:p>
+        </p:txBody>
+      </p:sp>
+      <p:sp>
+        <p:nvSpPr>
+          <p:cNvPr id="25" name="Slide Number Placeholder 0"/>
+          <p:cNvSpPr>
+            <a:spLocks noGrp="1"/>
+          </p:cNvSpPr>
+          <p:nvPr>
+            <p:ph type="sldNum" sz="quarter" idx="4294967295"/>
+          </p:nvPr>
+        </p:nvSpPr>
+        <p:spPr>
+          <a:xfrm>
+            <a:off x="11094415" y="6400800"/>
+            <a:ext cx="548640" cy="274320"/>
+          </a:xfrm>
+          <a:prstGeom prst="rect">
+            <a:avLst/>
+          </a:prstGeom>
+          <a:extLst>
+            <a:ext uri="{C572A759-6A51-4108-AA02-DFA0A04FC94B}">
+              <ns3:wrappingTextBoxFlag val="0"/>
+            </a:ext>
+          </a:extLst>
+        </p:spPr>
+        <p:txBody>
+          <a:bodyPr/>
+          <a:lstStyle>
+            <a:lvl1pPr>
+              <a:defRPr sz="1000">
+                <a:solidFill>
+                  <a:schemeClr val="accent6"/>
+                </a:solidFill>
+                <a:latin typeface="Calibri"/>
+                <a:ea typeface="Calibri"/>
+                <a:cs typeface="Calibri"/>
+              </a:defRPr>
+            </a:lvl1pPr>
+          </a:lstStyle>
+          <a:p>
+            <a:pPr algn="r"/>
+            <a:fld id="{F7021451-1387-4CA6-816F-3879F97B5CBC}" type="slidenum">
+              <a:rPr b="0" lang="en-US"/>
+              <a:t>11</a:t>
+            </a:fld>
+            <a:endParaRPr lang="en-US"/>
           </a:p>
         </p:txBody>
       </p:sp>
@@ -4425,7 +4781,7 @@
 </file>
 
 <file path=ppt/slides/slide3.xml><?xml version="1.0" encoding="utf-8"?>
-<p:sld xmlns:a="http://schemas.openxmlformats.org/drawingml/2006/main" xmlns:r="http://schemas.openxmlformats.org/officeDocument/2006/relationships" xmlns:p="http://schemas.openxmlformats.org/presentationml/2006/main">
+<p:sld xmlns:a="http://schemas.openxmlformats.org/drawingml/2006/main" xmlns:ns3="http://schemas.microsoft.com/office/mac/drawingml/2011/main" xmlns:p="http://schemas.openxmlformats.org/presentationml/2006/main" xmlns:r="http://schemas.openxmlformats.org/officeDocument/2006/relationships">
   <p:cSld name="Slide 3">
     <p:spTree>
       <p:nvGrpSpPr>
@@ -4740,7 +5096,7 @@
                 <a:ea typeface="Calibri" pitchFamily="34" charset="-122"/>
                 <a:cs typeface="Calibri" pitchFamily="34" charset="-120"/>
               </a:rPr>
-              <a:t>Comparison and questions about a listing</a:t>
+              <a:t>Collapsible listing cards and comparison</a:t>
             </a:r>
             <a:endParaRPr lang="en-US" sz="1600" dirty="0"/>
           </a:p>
@@ -4828,7 +5184,7 @@
                 <a:ea typeface="Calibri" pitchFamily="34" charset="-122"/>
                 <a:cs typeface="Calibri" pitchFamily="34" charset="-120"/>
               </a:rPr>
-              <a:t>Real photo or AI illustration of a room</a:t>
+              <a:t>Images on request: owner, credited sample or AI</a:t>
             </a:r>
             <a:endParaRPr lang="en-US" sz="1600" dirty="0"/>
           </a:p>
@@ -4916,7 +5272,7 @@
                 <a:ea typeface="Calibri" pitchFamily="34" charset="-122"/>
                 <a:cs typeface="Calibri" pitchFamily="34" charset="-120"/>
               </a:rPr>
-              <a:t>Listing submission approved by an administrator</a:t>
+              <a:t>Persistent proposal, then administrator decision</a:t>
             </a:r>
             <a:endParaRPr lang="en-US" sz="1600" dirty="0"/>
           </a:p>
@@ -5067,7 +5423,7 @@
                 <a:ea typeface="Calibri" pitchFamily="34" charset="-122"/>
                 <a:cs typeface="Calibri" pitchFamily="34" charset="-120"/>
               </a:rPr>
-              <a:t>Real screenshot (French UI): Nemotron reply via Meterless, listings read via Zetaris, Scout trace, then a refused payment.</a:t>
+              <a:t>Historical capture: search and Scout guard. Chat images are now sent only on explicit request.</a:t>
             </a:r>
             <a:endParaRPr lang="en-US" sz="1200" dirty="0"/>
           </a:p>
@@ -5166,7 +5522,7 @@
           </a:prstGeom>
           <a:extLst>
             <a:ext uri="{C572A759-6A51-4108-AA02-DFA0A04FC94B}">
-              <ma14:wrappingTextBoxFlag xmlns:ma14="http://schemas.microsoft.com/office/mac/drawingml/2011/main" val="0"/>
+              <ns3:wrappingTextBoxFlag val="0"/>
             </a:ext>
           </a:extLst>
         </p:spPr>
@@ -5203,7 +5559,7 @@
 </file>
 
 <file path=ppt/slides/slide4.xml><?xml version="1.0" encoding="utf-8"?>
-<p:sld xmlns:a="http://schemas.openxmlformats.org/drawingml/2006/main" xmlns:r="http://schemas.openxmlformats.org/officeDocument/2006/relationships" xmlns:p="http://schemas.openxmlformats.org/presentationml/2006/main">
+<p:sld xmlns:a="http://schemas.openxmlformats.org/drawingml/2006/main" xmlns:ns2="http://schemas.microsoft.com/office/mac/drawingml/2011/main" xmlns:p="http://schemas.openxmlformats.org/presentationml/2006/main">
   <p:cSld name="Slide 4">
     <p:spTree>
       <p:nvGrpSpPr>
@@ -5405,7 +5761,7 @@
                 <a:ea typeface="Calibri" pitchFamily="34" charset="-122"/>
                 <a:cs typeface="Calibri" pitchFamily="34" charset="-120"/>
               </a:rPr>
-              <a:t>Intent, guard, signed contract</a:t>
+              <a:t>Guard, contract; simplified routing by default</a:t>
             </a:r>
             <a:endParaRPr lang="en-US" sz="1300" dirty="0"/>
           </a:p>
@@ -5757,7 +6113,7 @@
                 <a:ea typeface="Calibri" pitchFamily="34" charset="-122"/>
                 <a:cs typeface="Calibri" pitchFamily="34" charset="-120"/>
               </a:rPr>
-              <a:t>Listings via SQL (REST API)</a:t>
+              <a:t>SQL API; visible PostgreSQL fallback</a:t>
             </a:r>
             <a:endParaRPr lang="en-US" sz="1300" dirty="0"/>
           </a:p>
@@ -6285,7 +6641,7 @@
                 <a:ea typeface="Calibri" pitchFamily="34" charset="-122"/>
                 <a:cs typeface="Calibri" pitchFamily="34" charset="-120"/>
               </a:rPr>
-              <a:t>Cards, images, voice</a:t>
+              <a:t>Collapsible cards, requested images, voice</a:t>
             </a:r>
             <a:endParaRPr lang="en-US" sz="1300" dirty="0"/>
           </a:p>
@@ -6383,7 +6739,7 @@
                 <a:ea typeface="Calibri" pitchFamily="34" charset="-122"/>
                 <a:cs typeface="Calibri" pitchFamily="34" charset="-120"/>
               </a:rPr>
-              <a:t>Every reply carries its trace: intent, contract, tools, model (nvidia/nemotron-3-ultra-550b-a55b), source (Zetaris).</a:t>
+              <a:t>Replies expose actual provenance: model or template, data source used, Scout trace where applicable.</a:t>
             </a:r>
             <a:endParaRPr lang="en-US" sz="1500" dirty="0"/>
           </a:p>
@@ -6430,7 +6786,7 @@
           </a:prstGeom>
           <a:extLst>
             <a:ext uri="{C572A759-6A51-4108-AA02-DFA0A04FC94B}">
-              <ma14:wrappingTextBoxFlag xmlns:ma14="http://schemas.microsoft.com/office/mac/drawingml/2011/main" val="0"/>
+              <ns2:wrappingTextBoxFlag val="0"/>
             </a:ext>
           </a:extLst>
         </p:spPr>
@@ -6467,7 +6823,7 @@
 </file>
 
 <file path=ppt/slides/slide5.xml><?xml version="1.0" encoding="utf-8"?>
-<p:sld xmlns:a="http://schemas.openxmlformats.org/drawingml/2006/main" xmlns:r="http://schemas.openxmlformats.org/officeDocument/2006/relationships" xmlns:p="http://schemas.openxmlformats.org/presentationml/2006/main">
+<p:sld xmlns:a="http://schemas.openxmlformats.org/drawingml/2006/main" xmlns:ns3="http://schemas.microsoft.com/office/mac/drawingml/2011/main" xmlns:p="http://schemas.openxmlformats.org/presentationml/2006/main" xmlns:r="http://schemas.openxmlformats.org/officeDocument/2006/relationships">
   <p:cSld name="Slide 5">
     <p:spTree>
       <p:nvGrpSpPr>
@@ -7001,7 +7357,7 @@
                 <a:ea typeface="Calibri" pitchFamily="34" charset="-122"/>
                 <a:cs typeface="Calibri" pitchFamily="34" charset="-120"/>
               </a:rPr>
-              <a:t>Meterless Scout Intent (Python) · Cursor and Claude Code · 148 tests</a:t>
+              <a:t>Scout Intent (Python) · Cursor and Claude Code · 214 passed, 2 skipped</a:t>
             </a:r>
             <a:endParaRPr lang="en-US" sz="1400" dirty="0"/>
           </a:p>
@@ -7510,7 +7866,7 @@
           </a:prstGeom>
           <a:extLst>
             <a:ext uri="{C572A759-6A51-4108-AA02-DFA0A04FC94B}">
-              <ma14:wrappingTextBoxFlag xmlns:ma14="http://schemas.microsoft.com/office/mac/drawingml/2011/main" val="0"/>
+              <ns3:wrappingTextBoxFlag val="0"/>
             </a:ext>
           </a:extLst>
         </p:spPr>
@@ -7547,7 +7903,7 @@
 </file>
 
 <file path=ppt/slides/slide6.xml><?xml version="1.0" encoding="utf-8"?>
-<p:sld xmlns:a="http://schemas.openxmlformats.org/drawingml/2006/main" xmlns:r="http://schemas.openxmlformats.org/officeDocument/2006/relationships" xmlns:p="http://schemas.openxmlformats.org/presentationml/2006/main">
+<p:sld xmlns:a="http://schemas.openxmlformats.org/drawingml/2006/main" xmlns:ns2="http://schemas.microsoft.com/office/mac/drawingml/2011/main" xmlns:p="http://schemas.openxmlformats.org/presentationml/2006/main">
   <p:cSld name="Slide 6">
     <p:spTree>
       <p:nvGrpSpPr>
@@ -7710,7 +8066,7 @@
                 <a:ea typeface="Calibri" pitchFamily="34" charset="-122"/>
                 <a:cs typeface="Calibri" pitchFamily="34" charset="-120"/>
               </a:rPr>
-              <a:t>every search</a:t>
+              <a:t>configured source</a:t>
             </a:r>
             <a:endParaRPr lang="en-US" sz="1300" dirty="0"/>
           </a:p>
@@ -8164,7 +8520,7 @@
                 <a:ea typeface="Calibri" pitchFamily="34" charset="-122"/>
                 <a:cs typeface="Calibri" pitchFamily="34" charset="-120"/>
               </a:rPr>
-              <a:t>Single access point to listings: both chat and filter search query Zetaris in SQL.</a:t>
+              <a:t>Configured primary source: chat and filters query Zetaris, or PostgreSQL with explicit fallback.</a:t>
             </a:r>
             <a:endParaRPr lang="en-US" sz="1600" dirty="0"/>
           </a:p>
@@ -8206,7 +8562,7 @@
                 <a:ea typeface="Calibri" pitchFamily="34" charset="-122"/>
                 <a:cs typeface="Calibri" pitchFamily="34" charset="-120"/>
               </a:rPr>
-              <a:t>Listings submitted in the chat and approved appear immediately in searches via Zetaris.</a:t>
+              <a:t>Approval publishes to PostgreSQL; the federated view exposes approved listings.</a:t>
             </a:r>
             <a:endParaRPr lang="en-US" sz="1600" dirty="0"/>
           </a:p>
@@ -8248,7 +8604,7 @@
                 <a:ea typeface="Calibri" pitchFamily="34" charset="-122"/>
                 <a:cs typeface="Calibri" pitchFamily="34" charset="-120"/>
               </a:rPr>
-              <a:t>Proof: live status "zetaris: ok", data_source = zetaris in every reply, HTTP 200 logs.</a:t>
+              <a:t>Historical HTTP 200 evidence. Recent checks: Zetaris error, explicitly reported PostgreSQL fallback.</a:t>
             </a:r>
             <a:endParaRPr lang="en-US" sz="1600" dirty="0"/>
           </a:p>
@@ -8274,7 +8630,7 @@
           </a:prstGeom>
           <a:extLst>
             <a:ext uri="{C572A759-6A51-4108-AA02-DFA0A04FC94B}">
-              <ma14:wrappingTextBoxFlag xmlns:ma14="http://schemas.microsoft.com/office/mac/drawingml/2011/main" val="0"/>
+              <ns2:wrappingTextBoxFlag val="0"/>
             </a:ext>
           </a:extLst>
         </p:spPr>
@@ -8311,7 +8667,7 @@
 </file>
 
 <file path=ppt/slides/slide7.xml><?xml version="1.0" encoding="utf-8"?>
-<p:sld xmlns:a="http://schemas.openxmlformats.org/drawingml/2006/main" xmlns:r="http://schemas.openxmlformats.org/officeDocument/2006/relationships" xmlns:p="http://schemas.openxmlformats.org/presentationml/2006/main">
+<p:sld xmlns:a="http://schemas.openxmlformats.org/drawingml/2006/main" xmlns:ns2="http://schemas.microsoft.com/office/mac/drawingml/2011/main" xmlns:p="http://schemas.openxmlformats.org/presentationml/2006/main">
   <p:cSld name="Slide 7">
     <p:spTree>
       <p:nvGrpSpPr>
@@ -8770,7 +9126,7 @@
                 <a:ea typeface="Calibri" pitchFamily="34" charset="-122"/>
                 <a:cs typeface="Calibri" pitchFamily="34" charset="-120"/>
               </a:rPr>
-              <a:t>Before every action: one intent out of 7, 5-layer guard (injection, no payment, scope, personal data, rate).</a:t>
+              <a:t>Default: simplified routing, fragmented search, submissions and explicit images. Chat compare/contact require full Scout mode.</a:t>
             </a:r>
             <a:endParaRPr lang="en-US" sz="1600" dirty="0"/>
           </a:p>
@@ -9304,7 +9660,7 @@
                 <a:ea typeface="Calibri" pitchFamily="34" charset="-122"/>
                 <a:cs typeface="Calibri" pitchFamily="34" charset="-120"/>
               </a:rPr>
-              <a:t>Evaluated against the official Meterless thresholds (thresholds.yaml): 59 intents, 22 injection cases including the 10 official ones, 6 edge cases.</a:t>
+              <a:t>Historical full-Scout measurements: 59 intents, 22 injection cases, 6 edge cases; official Meterless thresholds.</a:t>
             </a:r>
             <a:endParaRPr lang="en-US" sz="1200" dirty="0"/>
           </a:p>
@@ -9330,7 +9686,7 @@
           </a:prstGeom>
           <a:extLst>
             <a:ext uri="{C572A759-6A51-4108-AA02-DFA0A04FC94B}">
-              <ma14:wrappingTextBoxFlag xmlns:ma14="http://schemas.microsoft.com/office/mac/drawingml/2011/main" val="0"/>
+              <ns2:wrappingTextBoxFlag val="0"/>
             </a:ext>
           </a:extLst>
         </p:spPr>
@@ -9367,7 +9723,7 @@
 </file>
 
 <file path=ppt/slides/slide8.xml><?xml version="1.0" encoding="utf-8"?>
-<p:sld xmlns:a="http://schemas.openxmlformats.org/drawingml/2006/main" xmlns:r="http://schemas.openxmlformats.org/officeDocument/2006/relationships" xmlns:p="http://schemas.openxmlformats.org/presentationml/2006/main">
+<p:sld xmlns:a="http://schemas.openxmlformats.org/drawingml/2006/main" xmlns:ns3="http://schemas.microsoft.com/office/mac/drawingml/2011/main" xmlns:p="http://schemas.openxmlformats.org/presentationml/2006/main" xmlns:r="http://schemas.openxmlformats.org/officeDocument/2006/relationships">
   <p:cSld name="Slide 8">
     <p:spTree>
       <p:nvGrpSpPr>
@@ -9418,7 +9774,7 @@
                 <a:ea typeface="Arial" pitchFamily="34" charset="-122"/>
                 <a:cs typeface="Arial" pitchFamily="34" charset="-120"/>
               </a:rPr>
-              <a:t>What makes our use unique</a:t>
+              <a:t>Controlled images and moderated proposals</a:t>
             </a:r>
             <a:endParaRPr lang="en-US" sz="3400" dirty="0"/>
           </a:p>
@@ -9540,7 +9896,7 @@
                 <a:ea typeface="Arial" pitchFamily="34" charset="-122"/>
                 <a:cs typeface="Arial" pitchFamily="34" charset="-120"/>
               </a:rPr>
-              <a:t>Scout as a real safeguard</a:t>
+              <a:t>Images only on request</a:t>
             </a:r>
             <a:endParaRPr lang="en-US" sz="1900" dirty="0"/>
           </a:p>
@@ -9579,7 +9935,7 @@
                 <a:ea typeface="Calibri" pitchFamily="34" charset="-122"/>
                 <a:cs typeface="Calibri" pitchFamily="34" charset="-120"/>
               </a:rPr>
-              <a:t>No tool without a signed contract; the "send the deposit by Orange Money" scam is blocked before any model call.</a:t>
+              <a:t>Named target respected; ambiguity means clarification. Owner photo, credited sample, reused illustration, then generation.</a:t>
             </a:r>
             <a:endParaRPr lang="en-US" sz="1400" dirty="0"/>
           </a:p>
@@ -9701,7 +10057,7 @@
                 <a:ea typeface="Arial" pitchFamily="34" charset="-122"/>
                 <a:cs typeface="Arial" pitchFamily="34" charset="-120"/>
               </a:rPr>
-              <a:t>Zetaris on a living database</a:t>
+              <a:t>Cameroonian context</a:t>
             </a:r>
             <a:endParaRPr lang="en-US" sz="1900" dirty="0"/>
           </a:p>
@@ -9740,7 +10096,7 @@
                 <a:ea typeface="Calibri" pitchFamily="34" charset="-122"/>
                 <a:cs typeface="Calibri" pitchFamily="34" charset="-120"/>
               </a:rPr>
-              <a:t>Approved landlord listings join the data layer without changing the agent.</a:t>
+              <a:t>Documentary Douala/Yaoundé prompt, facts first, 2,048 characters. Labelled AI illustration; no authenticity claim.</a:t>
             </a:r>
             <a:endParaRPr lang="en-US" sz="1400" dirty="0"/>
           </a:p>
@@ -9862,7 +10218,7 @@
                 <a:ea typeface="Arial" pitchFamily="34" charset="-122"/>
                 <a:cs typeface="Arial" pitchFamily="34" charset="-120"/>
               </a:rPr>
-              <a:t>Nemotron invents nothing</a:t>
+              <a:t>Pending proposal, no publication</a:t>
             </a:r>
             <a:endParaRPr lang="en-US" sz="1900" dirty="0"/>
           </a:p>
@@ -9901,7 +10257,7 @@
                 <a:ea typeface="Calibri" pitchFamily="34" charset="-122"/>
                 <a:cs typeface="Calibri" pitchFamily="34" charset="-120"/>
               </a:rPr>
-              <a:t>It only sees computed facts; when information is missing, it says so and advises asking for it.</a:t>
+              <a:t>Draft then confirmation: pending in the database. Authenticated admin: details, photos, note, approve/reject, filters and logout.</a:t>
             </a:r>
             <a:endParaRPr lang="en-US" sz="1400" dirty="0"/>
           </a:p>
@@ -10023,7 +10379,7 @@
                 <a:ea typeface="Arial" pitchFamily="34" charset="-122"/>
                 <a:cs typeface="Arial" pitchFamily="34" charset="-120"/>
               </a:rPr>
-              <a:t>Reliable demo</a:t>
+              <a:t>Verification clearly separated</a:t>
             </a:r>
             <a:endParaRPr lang="en-US" sz="1900" dirty="0"/>
           </a:p>
@@ -10062,7 +10418,7 @@
                 <a:ea typeface="Calibri" pitchFamily="34" charset="-122"/>
                 <a:cs typeface="Calibri" pitchFamily="34" charset="-120"/>
               </a:rPr>
-              <a:t>Everything verified live; SAMPLE_MODE runs the flow without any external service.</a:t>
+              <a:t>Live submission and rejection; offline approval and photos. 214 passed, 2 skipped. Global UTC quota; reuse costs no generation.</a:t>
             </a:r>
             <a:endParaRPr lang="en-US" sz="1400" dirty="0"/>
           </a:p>
@@ -10088,7 +10444,7 @@
           </a:prstGeom>
           <a:extLst>
             <a:ext uri="{C572A759-6A51-4108-AA02-DFA0A04FC94B}">
-              <ma14:wrappingTextBoxFlag xmlns:ma14="http://schemas.microsoft.com/office/mac/drawingml/2011/main" val="0"/>
+              <ns3:wrappingTextBoxFlag val="0"/>
             </a:ext>
           </a:extLst>
         </p:spPr>
@@ -10125,7 +10481,7 @@
 </file>
 
 <file path=ppt/slides/slide9.xml><?xml version="1.0" encoding="utf-8"?>
-<p:sld xmlns:a="http://schemas.openxmlformats.org/drawingml/2006/main" xmlns:r="http://schemas.openxmlformats.org/officeDocument/2006/relationships" xmlns:p="http://schemas.openxmlformats.org/presentationml/2006/main">
+<p:sld xmlns:a="http://schemas.openxmlformats.org/drawingml/2006/main" xmlns:ns3="http://schemas.microsoft.com/office/mac/drawingml/2011/main" xmlns:p="http://schemas.openxmlformats.org/presentationml/2006/main" xmlns:r="http://schemas.openxmlformats.org/officeDocument/2006/relationships">
   <p:cSld name="Slide 9">
     <p:spTree>
       <p:nvGrpSpPr>
@@ -10176,7 +10532,7 @@
                 <a:ea typeface="Arial" pitchFamily="34" charset="-122"/>
                 <a:cs typeface="Arial" pitchFamily="34" charset="-120"/>
               </a:rPr>
-              <a:t>The product in pictures</a:t>
+              <a:t>Search and images: historical captures</a:t>
             </a:r>
             <a:endParaRPr lang="en-US" sz="3400" dirty="0"/>
           </a:p>
@@ -10263,7 +10619,7 @@
                 <a:ea typeface="Calibri" pitchFamily="34" charset="-122"/>
                 <a:cs typeface="Calibri" pitchFamily="34" charset="-120"/>
               </a:rPr>
-              <a:t>Results: credited sample photo, rent, amenities; unknown information stays "not specified".</a:t>
+              <a:t>Credited sample photo on a fictional listing. Today, expand the results panel, closed by default.</a:t>
             </a:r>
             <a:endParaRPr lang="en-US" sz="1300" dirty="0"/>
           </a:p>
@@ -10302,7 +10658,7 @@
                 <a:ea typeface="Calibri" pitchFamily="34" charset="-122"/>
                 <a:cs typeface="Calibri" pitchFamily="34" charset="-120"/>
               </a:rPr>
-              <a:t>AI illustration of a living room (Cloudflare FLUX), guided by vision and Cameroonian context, always labelled.</a:t>
+              <a:t>Historical Cloudflare illustration, not a photograph of the home. Now explicit requests only; Nemotron gets metadata, not pixels.</a:t>
             </a:r>
             <a:endParaRPr lang="en-US" sz="1300" dirty="0"/>
           </a:p>
@@ -10328,7 +10684,7 @@
           </a:prstGeom>
           <a:extLst>
             <a:ext uri="{C572A759-6A51-4108-AA02-DFA0A04FC94B}">
-              <ma14:wrappingTextBoxFlag xmlns:ma14="http://schemas.microsoft.com/office/mac/drawingml/2011/main" val="0"/>
+              <ns3:wrappingTextBoxFlag val="0"/>
             </a:ext>
           </a:extLst>
         </p:spPr>
